--- a/한계_차월_장표.pptx
+++ b/한계_차월_장표.pptx
@@ -502,7 +502,7 @@
           <a:p>
             <a:r>
               <a:rPr lang="en-US" dirty="0"/>
-              <a:t>80점으로 만든 모델은 대부분 응답에서 정확하지만, 2차 균일도는 교차검증 R²가 0.893으로 가장 낮고, 예측 불확실성도 응답 변동폭의 43%로 가장 큽니다. 설계공간의 17%는 불확실성이 변동폭의 절반을 넘습니다. 2차 균일도는 변수끼리 얽힌 효과가 19%로 가장 커서 복잡하게 변하는데, 8차원 공간에 80점이면 새 설계에서 가장 가까운 해석점이 보통 범위의 절반쯤 떨어져 있어 이런 변화를 다 담지 못합니다. 그래서 차월에는 균일하게 점을 더 뽑는 대신, GPR 불확실성이 큰 지점만 골라 해석을 추가하는 적응 샘플링으로 모델을 보강합니다.</a:t>
+              <a:t>80점으로 만든 모델은 대부분 응답에서 정확하지만, 2차 균일도는 교차검증 R²가 0.893으로 가장 낮고, 예측 불확실성도 응답 변동폭의 43%로 가장 큽니다. 2차 균일도는 변수끼리 얽힌 효과가 19%로 가장 커서 복잡하게 변하는데, 8차원 공간에 80점이면 새 설계에서 가장 가까운 해석점이 보통 범위의 절반쯤 떨어져 있어 이런 변화를 다 담지 못합니다. 그래서 차월에는 균일하게 점을 더 뽑는 대신, GPR 불확실성이 큰 지점만 골라 해석을 추가하는 적응 샘플링으로 모델을 보강합니다.</a:t>
             </a:r>
             <a:endParaRPr lang="en-US" dirty="0"/>
           </a:p>
@@ -1598,150 +1598,7 @@
                           <a:ea typeface="Malgun Gothic" pitchFamily="34" charset="-122"/>
                           <a:cs typeface="Malgun Gothic" pitchFamily="34" charset="-120"/>
                         </a:rPr>
-                        <a:t>③ 불확실성 큰 영역 비율</a:t>
-                      </a:r>
-                      <a:endParaRPr lang="en-US" sz="900" dirty="0">
-                        <a:latin typeface="Malgun Gothic" charset="0"/>
-                        <a:ea typeface="Malgun Gothic" charset="0"/>
-                        <a:cs typeface="Malgun Gothic" charset="0"/>
-                      </a:endParaRPr>
-                    </a:p>
-                  </a:txBody>
-                  <a:tcPr marL="50800" marR="50800" marT="25400" marB="25400" anchor="ctr">
-                    <a:lnL w="0" cap="flat" cmpd="sng" algn="ctr">
-                      <a:noFill/>
-                    </a:lnL>
-                    <a:lnR w="0" cap="flat" cmpd="sng" algn="ctr">
-                      <a:noFill/>
-                    </a:lnR>
-                    <a:lnT w="0" cap="flat" cmpd="sng" algn="ctr">
-                      <a:noFill/>
-                    </a:lnT>
-                    <a:lnB w="6350" cap="flat" cmpd="sng" algn="ctr">
-                      <a:solidFill>
-                        <a:srgbClr val="DDE3EB"/>
-                      </a:solidFill>
-                      <a:prstDash val="solid"/>
-                      <a:round/>
-                      <a:headEnd type="none" w="med" len="med"/>
-                      <a:tailEnd type="none" w="med" len="med"/>
-                    </a:lnB>
-                  </a:tcPr>
-                </a:tc>
-                <a:tc>
-                  <a:txBody>
-                    <a:bodyPr/>
-                    <a:lstStyle/>
-                    <a:p>
-                      <a:pPr indent="0" marL="0">
-                        <a:buNone/>
-                      </a:pPr>
-                      <a:r>
-                        <a:rPr lang="en-US" sz="900" b="1" dirty="0">
-                          <a:solidFill>
-                            <a:srgbClr val="0088A6"/>
-                          </a:solidFill>
-                          <a:latin typeface="Malgun Gothic" pitchFamily="34" charset="0"/>
-                          <a:ea typeface="Malgun Gothic" pitchFamily="34" charset="-122"/>
-                          <a:cs typeface="Malgun Gothic" pitchFamily="34" charset="-120"/>
-                        </a:rPr>
-                        <a:t>설계공간 17%</a:t>
-                      </a:r>
-                      <a:endParaRPr lang="en-US" sz="900" dirty="0">
-                        <a:latin typeface="Malgun Gothic" charset="0"/>
-                        <a:ea typeface="Malgun Gothic" charset="0"/>
-                        <a:cs typeface="Malgun Gothic" charset="0"/>
-                      </a:endParaRPr>
-                    </a:p>
-                  </a:txBody>
-                  <a:tcPr marL="50800" marR="50800" marT="25400" marB="25400" anchor="ctr">
-                    <a:lnL w="0" cap="flat" cmpd="sng" algn="ctr">
-                      <a:noFill/>
-                    </a:lnL>
-                    <a:lnR w="0" cap="flat" cmpd="sng" algn="ctr">
-                      <a:noFill/>
-                    </a:lnR>
-                    <a:lnT w="0" cap="flat" cmpd="sng" algn="ctr">
-                      <a:noFill/>
-                    </a:lnT>
-                    <a:lnB w="6350" cap="flat" cmpd="sng" algn="ctr">
-                      <a:solidFill>
-                        <a:srgbClr val="DDE3EB"/>
-                      </a:solidFill>
-                      <a:prstDash val="solid"/>
-                      <a:round/>
-                      <a:headEnd type="none" w="med" len="med"/>
-                      <a:tailEnd type="none" w="med" len="med"/>
-                    </a:lnB>
-                  </a:tcPr>
-                </a:tc>
-                <a:tc>
-                  <a:txBody>
-                    <a:bodyPr/>
-                    <a:lstStyle/>
-                    <a:p>
-                      <a:pPr indent="0" marL="0">
-                        <a:buNone/>
-                      </a:pPr>
-                      <a:r>
-                        <a:rPr lang="en-US" sz="900" dirty="0">
-                          <a:solidFill>
-                            <a:srgbClr val="1C2733"/>
-                          </a:solidFill>
-                          <a:latin typeface="Malgun Gothic" pitchFamily="34" charset="0"/>
-                          <a:ea typeface="Malgun Gothic" pitchFamily="34" charset="-122"/>
-                          <a:cs typeface="Malgun Gothic" pitchFamily="34" charset="-120"/>
-                        </a:rPr>
-                        <a:t>0 ~ 2%</a:t>
-                      </a:r>
-                      <a:endParaRPr lang="en-US" sz="900" dirty="0">
-                        <a:latin typeface="Malgun Gothic" charset="0"/>
-                        <a:ea typeface="Malgun Gothic" charset="0"/>
-                        <a:cs typeface="Malgun Gothic" charset="0"/>
-                      </a:endParaRPr>
-                    </a:p>
-                  </a:txBody>
-                  <a:tcPr marL="50800" marR="50800" marT="25400" marB="25400" anchor="ctr">
-                    <a:lnL w="0" cap="flat" cmpd="sng" algn="ctr">
-                      <a:noFill/>
-                    </a:lnL>
-                    <a:lnR w="0" cap="flat" cmpd="sng" algn="ctr">
-                      <a:noFill/>
-                    </a:lnR>
-                    <a:lnT w="0" cap="flat" cmpd="sng" algn="ctr">
-                      <a:noFill/>
-                    </a:lnT>
-                    <a:lnB w="6350" cap="flat" cmpd="sng" algn="ctr">
-                      <a:solidFill>
-                        <a:srgbClr val="DDE3EB"/>
-                      </a:solidFill>
-                      <a:prstDash val="solid"/>
-                      <a:round/>
-                      <a:headEnd type="none" w="med" len="med"/>
-                      <a:tailEnd type="none" w="med" len="med"/>
-                    </a:lnB>
-                  </a:tcPr>
-                </a:tc>
-              </a:tr>
-              <a:tr h="384048">
-                <a:tc>
-                  <a:txBody>
-                    <a:bodyPr/>
-                    <a:lstStyle/>
-                    <a:p>
-                      <a:pPr indent="0" marL="0">
-                        <a:buNone/>
-                      </a:pPr>
-                      <a:r>
-                        <a:rPr lang="en-US" sz="900" dirty="0">
-                          <a:solidFill>
-                            <a:srgbClr val="1C2733"/>
-                          </a:solidFill>
-                          <a:latin typeface="Malgun Gothic" pitchFamily="34" charset="0"/>
-                          <a:ea typeface="Malgun Gothic" pitchFamily="34" charset="-122"/>
-                          <a:cs typeface="Malgun Gothic" pitchFamily="34" charset="-120"/>
-                        </a:rPr>
-                        <a:t>④ 교호작용 비율</a:t>
+                        <a:t>③ 교호작용 비율</a:t>
                       </a:r>
                       <a:endParaRPr lang="en-US" sz="900" dirty="0">
                         <a:latin typeface="Malgun Gothic" charset="0"/>
@@ -1933,7 +1790,7 @@
                 <a:ea typeface="Malgun Gothic" pitchFamily="34" charset="-122"/>
                 <a:cs typeface="Malgun Gothic" pitchFamily="34" charset="-120"/>
               </a:rPr>
-              <a:t>⑤ 8차원 공간에 80점 — 데이터가 성김</a:t>
+              <a:t>④ 8차원 공간에 80점 — 데이터가 성김</a:t>
             </a:r>
             <a:endParaRPr lang="en-US" sz="930" dirty="0"/>
           </a:p>
